--- a/Documents/SDU/fagråd/plakater/pdf/IMADA_SKAKTURN_VINDERE.pptx
+++ b/Documents/SDU/fagråd/plakater/pdf/IMADA_SKAKTURN_VINDERE.pptx
@@ -205,7 +205,7 @@
           <a:p>
             <a:fld id="{B07987E8-53A3-47B5-8F48-50EB5178F685}" type="datetimeFigureOut">
               <a:rPr lang="da-DK" smtClean="0"/>
-              <a:t>12.11.2025</a:t>
+              <a:t>22.02.2026</a:t>
             </a:fld>
             <a:endParaRPr lang="da-DK"/>
           </a:p>
@@ -705,7 +705,7 @@
           <a:p>
             <a:fld id="{7CAF6849-F4B2-44D2-B8FB-E45FA684ADCF}" type="datetimeFigureOut">
               <a:rPr lang="da-DK" smtClean="0"/>
-              <a:t>12.11.2025</a:t>
+              <a:t>22.02.2026</a:t>
             </a:fld>
             <a:endParaRPr lang="da-DK"/>
           </a:p>
@@ -905,7 +905,7 @@
           <a:p>
             <a:fld id="{7CAF6849-F4B2-44D2-B8FB-E45FA684ADCF}" type="datetimeFigureOut">
               <a:rPr lang="da-DK" smtClean="0"/>
-              <a:t>12.11.2025</a:t>
+              <a:t>22.02.2026</a:t>
             </a:fld>
             <a:endParaRPr lang="da-DK"/>
           </a:p>
@@ -1115,7 +1115,7 @@
           <a:p>
             <a:fld id="{7CAF6849-F4B2-44D2-B8FB-E45FA684ADCF}" type="datetimeFigureOut">
               <a:rPr lang="da-DK" smtClean="0"/>
-              <a:t>12.11.2025</a:t>
+              <a:t>22.02.2026</a:t>
             </a:fld>
             <a:endParaRPr lang="da-DK"/>
           </a:p>
@@ -1315,7 +1315,7 @@
           <a:p>
             <a:fld id="{7CAF6849-F4B2-44D2-B8FB-E45FA684ADCF}" type="datetimeFigureOut">
               <a:rPr lang="da-DK" smtClean="0"/>
-              <a:t>12.11.2025</a:t>
+              <a:t>22.02.2026</a:t>
             </a:fld>
             <a:endParaRPr lang="da-DK"/>
           </a:p>
@@ -1591,7 +1591,7 @@
           <a:p>
             <a:fld id="{7CAF6849-F4B2-44D2-B8FB-E45FA684ADCF}" type="datetimeFigureOut">
               <a:rPr lang="da-DK" smtClean="0"/>
-              <a:t>12.11.2025</a:t>
+              <a:t>22.02.2026</a:t>
             </a:fld>
             <a:endParaRPr lang="da-DK"/>
           </a:p>
@@ -1859,7 +1859,7 @@
           <a:p>
             <a:fld id="{7CAF6849-F4B2-44D2-B8FB-E45FA684ADCF}" type="datetimeFigureOut">
               <a:rPr lang="da-DK" smtClean="0"/>
-              <a:t>12.11.2025</a:t>
+              <a:t>22.02.2026</a:t>
             </a:fld>
             <a:endParaRPr lang="da-DK"/>
           </a:p>
@@ -2274,7 +2274,7 @@
           <a:p>
             <a:fld id="{7CAF6849-F4B2-44D2-B8FB-E45FA684ADCF}" type="datetimeFigureOut">
               <a:rPr lang="da-DK" smtClean="0"/>
-              <a:t>12.11.2025</a:t>
+              <a:t>22.02.2026</a:t>
             </a:fld>
             <a:endParaRPr lang="da-DK"/>
           </a:p>
@@ -2416,7 +2416,7 @@
           <a:p>
             <a:fld id="{7CAF6849-F4B2-44D2-B8FB-E45FA684ADCF}" type="datetimeFigureOut">
               <a:rPr lang="da-DK" smtClean="0"/>
-              <a:t>12.11.2025</a:t>
+              <a:t>22.02.2026</a:t>
             </a:fld>
             <a:endParaRPr lang="da-DK"/>
           </a:p>
@@ -2529,7 +2529,7 @@
           <a:p>
             <a:fld id="{7CAF6849-F4B2-44D2-B8FB-E45FA684ADCF}" type="datetimeFigureOut">
               <a:rPr lang="da-DK" smtClean="0"/>
-              <a:t>12.11.2025</a:t>
+              <a:t>22.02.2026</a:t>
             </a:fld>
             <a:endParaRPr lang="da-DK"/>
           </a:p>
@@ -2842,7 +2842,7 @@
           <a:p>
             <a:fld id="{7CAF6849-F4B2-44D2-B8FB-E45FA684ADCF}" type="datetimeFigureOut">
               <a:rPr lang="da-DK" smtClean="0"/>
-              <a:t>12.11.2025</a:t>
+              <a:t>22.02.2026</a:t>
             </a:fld>
             <a:endParaRPr lang="da-DK"/>
           </a:p>
@@ -3131,7 +3131,7 @@
           <a:p>
             <a:fld id="{7CAF6849-F4B2-44D2-B8FB-E45FA684ADCF}" type="datetimeFigureOut">
               <a:rPr lang="da-DK" smtClean="0"/>
-              <a:t>12.11.2025</a:t>
+              <a:t>22.02.2026</a:t>
             </a:fld>
             <a:endParaRPr lang="da-DK"/>
           </a:p>
@@ -3386,7 +3386,7 @@
           <a:p>
             <a:fld id="{7CAF6849-F4B2-44D2-B8FB-E45FA684ADCF}" type="datetimeFigureOut">
               <a:rPr lang="da-DK" smtClean="0"/>
-              <a:t>12.11.2025</a:t>
+              <a:t>22.02.2026</a:t>
             </a:fld>
             <a:endParaRPr lang="da-DK"/>
           </a:p>
